--- a/presentations/17-cartridge-store/17-cartridge-store-lab.pptx
+++ b/presentations/17-cartridge-store/17-cartridge-store-lab.pptx
@@ -137,7 +137,7 @@
   <p:extLst>
     <p:ext uri="{521415D9-36F7-43E2-AB2F-B90AF26B5E84}">
       <p14:sectionLst xmlns:p14="http://schemas.microsoft.com/office/powerpoint/2010/main">
-        <p14:section name="Opening" id="{ca0f4e81-a587-cc42-829f-f1419d540e4b}">
+        <p14:section name="Opening" id="{6354c5f5-524a-292f-71a4-b7709742a71f}">
           <p14:sldIdLst>
             <p14:sldId id="256"/>
             <p14:sldId id="257"/>
@@ -145,7 +145,7 @@
             <p14:sldId id="259"/>
           </p14:sldIdLst>
         </p14:section>
-        <p14:section name="Account and token" id="{6dbf4274-41f4-3f0f-7242-36760314fd9a}">
+        <p14:section name="Account and token" id="{df97cd5e-36ea-5bdf-f4f7-33b464c0a237}">
           <p14:sldIdLst>
             <p14:sldId id="260"/>
             <p14:sldId id="261"/>
@@ -153,7 +153,7 @@
             <p14:sldId id="263"/>
           </p14:sldIdLst>
         </p14:section>
-        <p14:section name="Build and describe" id="{22dc2a0d-b49b-e7fd-cfd7-e6deb247f83a}">
+        <p14:section name="Build and describe" id="{d492003b-414f-9325-00b8-e703f88ca19b}">
           <p14:sldIdLst>
             <p14:sldId id="264"/>
             <p14:sldId id="265"/>
@@ -162,7 +162,7 @@
             <p14:sldId id="268"/>
           </p14:sldIdLst>
         </p14:section>
-        <p14:section name="Submit" id="{8762ff99-7fa6-7b79-ff9b-04080bf497ea}">
+        <p14:section name="Submit" id="{c05b62bc-7e29-2146-c2f6-1f33cd24600a}">
           <p14:sldIdLst>
             <p14:sldId id="269"/>
             <p14:sldId id="270"/>
@@ -170,7 +170,7 @@
             <p14:sldId id="272"/>
           </p14:sldIdLst>
         </p14:section>
-        <p14:section name="Review" id="{ea5b80ec-29e4-bdfc-d71a-91e79c4bbac5}">
+        <p14:section name="Review" id="{1b6876b9-da78-0a9d-1f47-c0c50d5e0768}">
           <p14:sldIdLst>
             <p14:sldId id="273"/>
             <p14:sldId id="274"/>
@@ -179,7 +179,7 @@
             <p14:sldId id="277"/>
           </p14:sldIdLst>
         </p14:section>
-        <p14:section name="Visitor and scores" id="{16e3fe61-b1b2-dacc-e935-24d21e971860}">
+        <p14:section name="Visitor and scores" id="{b1d742ff-a459-7245-b87a-09f89c8aeda2}">
           <p14:sldIdLst>
             <p14:sldId id="278"/>
             <p14:sldId id="279"/>
@@ -187,7 +187,7 @@
             <p14:sldId id="281"/>
           </p14:sldIdLst>
         </p14:section>
-        <p14:section name="Your own Store" id="{da735bff-004e-b16e-cd8d-90775f7c3c2e}">
+        <p14:section name="Your own Store" id="{d408cedb-b3b7-26ff-19b1-d51463a4387f}">
           <p14:sldIdLst>
             <p14:sldId id="282"/>
             <p14:sldId id="283"/>
@@ -195,7 +195,7 @@
             <p14:sldId id="285"/>
           </p14:sldIdLst>
         </p14:section>
-        <p14:section name="Closing" id="{9b7c3243-bc65-c90b-6899-4b2cd1defbb0}">
+        <p14:section name="Closing" id="{e74d072c-2849-6f37-68fa-c5cb9b5ea744}">
           <p14:sldIdLst>
             <p14:sldId id="286"/>
           </p14:sldIdLst>
@@ -4389,7 +4389,7 @@
               <a:buNone/>
             </a:pPr>
             <a:r>
-              <a:rPr lang="en-US" sz="1050" dirty="0">
+              <a:rPr lang="en-US" sz="1300" dirty="0">
                 <a:solidFill>
                   <a:srgbClr val="8FB3A0"/>
                 </a:solidFill>
@@ -4399,14 +4399,14 @@
               </a:rPr>
               <a:t>#!/usr/bin/env bash</a:t>
             </a:r>
-            <a:endParaRPr lang="en-US" sz="1050" dirty="0"/>
+            <a:endParaRPr lang="en-US" sz="1300" dirty="0"/>
           </a:p>
           <a:p>
             <a:pPr indent="0" marL="0">
               <a:buNone/>
             </a:pPr>
             <a:r>
-              <a:rPr lang="en-US" sz="1050" dirty="0">
+              <a:rPr lang="en-US" sz="1300" dirty="0">
                 <a:solidFill>
                   <a:srgbClr val="8FB3A0"/>
                 </a:solidFill>
@@ -4416,14 +4416,14 @@
               </a:rPr>
               <a:t># Run from the PRG32 repository root after sourcing ESP-IDF.</a:t>
             </a:r>
-            <a:endParaRPr lang="en-US" sz="1050" dirty="0"/>
+            <a:endParaRPr lang="en-US" sz="1300" dirty="0"/>
           </a:p>
           <a:p>
             <a:pPr indent="0" marL="0">
               <a:buNone/>
             </a:pPr>
             <a:r>
-              <a:rPr lang="en-US" sz="1050" dirty="0">
+              <a:rPr lang="en-US" sz="1300" dirty="0">
                 <a:solidFill>
                   <a:srgbClr val="8FB3A0"/>
                 </a:solidFill>
@@ -4433,14 +4433,14 @@
               </a:rPr>
               <a:t># Builds one portable cartridge per Store architecture.</a:t>
             </a:r>
-            <a:endParaRPr lang="en-US" sz="1050" dirty="0"/>
+            <a:endParaRPr lang="en-US" sz="1300" dirty="0"/>
           </a:p>
           <a:p>
             <a:pPr indent="0" marL="0">
               <a:buNone/>
             </a:pPr>
             <a:r>
-              <a:rPr lang="en-US" sz="1050" dirty="0">
+              <a:rPr lang="en-US" sz="1300" dirty="0">
                 <a:solidFill>
                   <a:srgbClr val="E6EDF2"/>
                 </a:solidFill>
@@ -4450,14 +4450,14 @@
               </a:rPr>
               <a:t>mkdir -p build/store-lemon</a:t>
             </a:r>
-            <a:endParaRPr lang="en-US" sz="1050" dirty="0"/>
+            <a:endParaRPr lang="en-US" sz="1300" dirty="0"/>
           </a:p>
           <a:p>
             <a:pPr indent="0" marL="0">
               <a:buNone/>
             </a:pPr>
             <a:r>
-              <a:rPr lang="en-US" sz="1050" dirty="0">
+              <a:rPr lang="en-US" sz="1300" dirty="0">
                 <a:solidFill>
                   <a:srgbClr val="E6EDF2"/>
                 </a:solidFill>
@@ -4467,14 +4467,14 @@
               </a:rPr>
               <a:t>for ARCH in esp32c6 qemu; do</a:t>
             </a:r>
-            <a:endParaRPr lang="en-US" sz="1050" dirty="0"/>
+            <a:endParaRPr lang="en-US" sz="1300" dirty="0"/>
           </a:p>
           <a:p>
             <a:pPr indent="0" marL="0">
               <a:buNone/>
             </a:pPr>
             <a:r>
-              <a:rPr lang="en-US" sz="1050" dirty="0">
+              <a:rPr lang="en-US" sz="1300" dirty="0">
                 <a:solidFill>
                   <a:srgbClr val="E6EDF2"/>
                 </a:solidFill>
@@ -4484,14 +4484,14 @@
               </a:rPr>
               <a:t>  python3 -m prg32 cartridge build work/lemon_catcher_c_game.c \</a:t>
             </a:r>
-            <a:endParaRPr lang="en-US" sz="1050" dirty="0"/>
+            <a:endParaRPr lang="en-US" sz="1300" dirty="0"/>
           </a:p>
           <a:p>
             <a:pPr indent="0" marL="0">
               <a:buNone/>
             </a:pPr>
             <a:r>
-              <a:rPr lang="en-US" sz="1050" dirty="0">
+              <a:rPr lang="en-US" sz="1300" dirty="0">
                 <a:solidFill>
                   <a:srgbClr val="E6EDF2"/>
                 </a:solidFill>
@@ -4501,14 +4501,14 @@
               </a:rPr>
               <a:t>    --portable --architecture "$ARCH" \</a:t>
             </a:r>
-            <a:endParaRPr lang="en-US" sz="1050" dirty="0"/>
+            <a:endParaRPr lang="en-US" sz="1300" dirty="0"/>
           </a:p>
           <a:p>
             <a:pPr indent="0" marL="0">
               <a:buNone/>
             </a:pPr>
             <a:r>
-              <a:rPr lang="en-US" sz="1050" dirty="0">
+              <a:rPr lang="en-US" sz="1300" dirty="0">
                 <a:solidFill>
                   <a:srgbClr val="E6EDF2"/>
                 </a:solidFill>
@@ -4518,14 +4518,14 @@
               </a:rPr>
               <a:t>    --entry-prefix lemon_catcher_c --name lemon-catcher \</a:t>
             </a:r>
-            <a:endParaRPr lang="en-US" sz="1050" dirty="0"/>
+            <a:endParaRPr lang="en-US" sz="1300" dirty="0"/>
           </a:p>
           <a:p>
             <a:pPr indent="0" marL="0">
               <a:buNone/>
             </a:pPr>
             <a:r>
-              <a:rPr lang="en-US" sz="1050" dirty="0">
+              <a:rPr lang="en-US" sz="1300" dirty="0">
                 <a:solidFill>
                   <a:srgbClr val="E6EDF2"/>
                 </a:solidFill>
@@ -4535,14 +4535,14 @@
               </a:rPr>
               <a:t>    --out "build/store-lemon/lemon-catcher-$ARCH.prg32"</a:t>
             </a:r>
-            <a:endParaRPr lang="en-US" sz="1050" dirty="0"/>
+            <a:endParaRPr lang="en-US" sz="1300" dirty="0"/>
           </a:p>
           <a:p>
             <a:pPr indent="0" marL="0">
               <a:buNone/>
             </a:pPr>
             <a:r>
-              <a:rPr lang="en-US" sz="1050" dirty="0">
+              <a:rPr lang="en-US" sz="1300" dirty="0">
                 <a:solidFill>
                   <a:srgbClr val="E6EDF2"/>
                 </a:solidFill>
@@ -4552,14 +4552,14 @@
               </a:rPr>
               <a:t>done</a:t>
             </a:r>
-            <a:endParaRPr lang="en-US" sz="1050" dirty="0"/>
+            <a:endParaRPr lang="en-US" sz="1300" dirty="0"/>
           </a:p>
           <a:p>
             <a:pPr indent="0" marL="0">
               <a:buNone/>
             </a:pPr>
             <a:r>
-              <a:rPr lang="en-US" sz="1050" dirty="0">
+              <a:rPr lang="en-US" sz="1300" dirty="0">
                 <a:solidFill>
                   <a:srgbClr val="E6EDF2"/>
                 </a:solidFill>
@@ -4567,9 +4567,26 @@
                 <a:ea typeface="Courier New" pitchFamily="34" charset="-122"/>
                 <a:cs typeface="Courier New" pitchFamily="34" charset="-120"/>
               </a:rPr>
-              <a:t>python3 -m prg32 cartridge summary build/store-lemon/lemon-catcher-esp32c6.prg32</a:t>
-            </a:r>
-            <a:endParaRPr lang="en-US" sz="1050" dirty="0"/>
+              <a:t>python3 -m prg32 cartridge summary</a:t>
+            </a:r>
+            <a:endParaRPr lang="en-US" sz="1300" dirty="0"/>
+          </a:p>
+          <a:p>
+            <a:pPr indent="0" marL="0">
+              <a:buNone/>
+            </a:pPr>
+            <a:r>
+              <a:rPr lang="en-US" sz="1300" dirty="0">
+                <a:solidFill>
+                  <a:srgbClr val="E6EDF2"/>
+                </a:solidFill>
+                <a:latin typeface="Courier New" pitchFamily="34" charset="0"/>
+                <a:ea typeface="Courier New" pitchFamily="34" charset="-122"/>
+                <a:cs typeface="Courier New" pitchFamily="34" charset="-120"/>
+              </a:rPr>
+              <a:t>    build/store-lemon/lemon-catcher-esp32c6.prg32</a:t>
+            </a:r>
+            <a:endParaRPr lang="en-US" sz="1300" dirty="0"/>
           </a:p>
         </p:txBody>
       </p:sp>
@@ -5714,7 +5731,7 @@
               <a:buNone/>
             </a:pPr>
             <a:r>
-              <a:rPr lang="en-US" sz="1000" dirty="0">
+              <a:rPr lang="en-US" sz="1050" dirty="0">
                 <a:solidFill>
                   <a:srgbClr val="E6EDF2"/>
                 </a:solidFill>
@@ -5724,14 +5741,14 @@
               </a:rPr>
               <a:t>{</a:t>
             </a:r>
-            <a:endParaRPr lang="en-US" sz="1000" dirty="0"/>
+            <a:endParaRPr lang="en-US" sz="1050" dirty="0"/>
           </a:p>
           <a:p>
             <a:pPr indent="0" marL="0">
               <a:buNone/>
             </a:pPr>
             <a:r>
-              <a:rPr lang="en-US" sz="1000" dirty="0">
+              <a:rPr lang="en-US" sz="1050" dirty="0">
                 <a:solidFill>
                   <a:srgbClr val="E6EDF2"/>
                 </a:solidFill>
@@ -5741,14 +5758,14 @@
               </a:rPr>
               <a:t>  "abi": "prg32-metadata-1.0",</a:t>
             </a:r>
-            <a:endParaRPr lang="en-US" sz="1000" dirty="0"/>
+            <a:endParaRPr lang="en-US" sz="1050" dirty="0"/>
           </a:p>
           <a:p>
             <a:pPr indent="0" marL="0">
               <a:buNone/>
             </a:pPr>
             <a:r>
-              <a:rPr lang="en-US" sz="1000" dirty="0">
+              <a:rPr lang="en-US" sz="1050" dirty="0">
                 <a:solidFill>
                   <a:srgbClr val="E6EDF2"/>
                 </a:solidFill>
@@ -5758,14 +5775,14 @@
               </a:rPr>
               <a:t>  "id": "org.example.lemon-catcher",</a:t>
             </a:r>
-            <a:endParaRPr lang="en-US" sz="1000" dirty="0"/>
+            <a:endParaRPr lang="en-US" sz="1050" dirty="0"/>
           </a:p>
           <a:p>
             <a:pPr indent="0" marL="0">
               <a:buNone/>
             </a:pPr>
             <a:r>
-              <a:rPr lang="en-US" sz="1000" dirty="0">
+              <a:rPr lang="en-US" sz="1050" dirty="0">
                 <a:solidFill>
                   <a:srgbClr val="E6EDF2"/>
                 </a:solidFill>
@@ -5775,14 +5792,14 @@
               </a:rPr>
               <a:t>  "title": "Lemon Catcher",</a:t>
             </a:r>
-            <a:endParaRPr lang="en-US" sz="1000" dirty="0"/>
+            <a:endParaRPr lang="en-US" sz="1050" dirty="0"/>
           </a:p>
           <a:p>
             <a:pPr indent="0" marL="0">
               <a:buNone/>
             </a:pPr>
             <a:r>
-              <a:rPr lang="en-US" sz="1000" dirty="0">
+              <a:rPr lang="en-US" sz="1050" dirty="0">
                 <a:solidFill>
                   <a:srgbClr val="E6EDF2"/>
                 </a:solidFill>
@@ -5792,14 +5809,14 @@
               </a:rPr>
               <a:t>  "version": "1.0.0",</a:t>
             </a:r>
-            <a:endParaRPr lang="en-US" sz="1000" dirty="0"/>
+            <a:endParaRPr lang="en-US" sz="1050" dirty="0"/>
           </a:p>
           <a:p>
             <a:pPr indent="0" marL="0">
               <a:buNone/>
             </a:pPr>
             <a:r>
-              <a:rPr lang="en-US" sz="1000" dirty="0">
+              <a:rPr lang="en-US" sz="1050" dirty="0">
                 <a:solidFill>
                   <a:srgbClr val="E6EDF2"/>
                 </a:solidFill>
@@ -5809,14 +5826,14 @@
               </a:rPr>
               <a:t>  "summary": "Catch the falling lemons with your basket.",</a:t>
             </a:r>
-            <a:endParaRPr lang="en-US" sz="1000" dirty="0"/>
+            <a:endParaRPr lang="en-US" sz="1050" dirty="0"/>
           </a:p>
           <a:p>
             <a:pPr indent="0" marL="0">
               <a:buNone/>
             </a:pPr>
             <a:r>
-              <a:rPr lang="en-US" sz="1000" dirty="0">
+              <a:rPr lang="en-US" sz="1050" dirty="0">
                 <a:solidFill>
                   <a:srgbClr val="E6EDF2"/>
                 </a:solidFill>
@@ -5824,16 +5841,16 @@
                 <a:ea typeface="Courier New" pitchFamily="34" charset="-122"/>
                 <a:cs typeface="Courier New" pitchFamily="34" charset="-120"/>
               </a:rPr>
-              <a:t>  "description": "A first cartridge from the Playing with RISC-V textbook. Move the</a:t>
-            </a:r>
-            <a:endParaRPr lang="en-US" sz="1000" dirty="0"/>
+              <a:t>  "description": "A first cartridge from the Playing with RISC-V</a:t>
+            </a:r>
+            <a:endParaRPr lang="en-US" sz="1050" dirty="0"/>
           </a:p>
           <a:p>
             <a:pPr indent="0" marL="0">
               <a:buNone/>
             </a:pPr>
             <a:r>
-              <a:rPr lang="en-US" sz="1000" dirty="0">
+              <a:rPr lang="en-US" sz="1050" dirty="0">
                 <a:solidFill>
                   <a:srgbClr val="E6EDF2"/>
                 </a:solidFill>
@@ -5841,16 +5858,16 @@
                 <a:ea typeface="Courier New" pitchFamily="34" charset="-122"/>
                 <a:cs typeface="Courier New" pitchFamily="34" charset="-120"/>
               </a:rPr>
-              <a:t>      basket with LEFT and RIGHT; five misses end the round.",</a:t>
-            </a:r>
-            <a:endParaRPr lang="en-US" sz="1000" dirty="0"/>
+              <a:t>      textbook. Move the basket with LEFT and RIGHT; five misses end the round.",</a:t>
+            </a:r>
+            <a:endParaRPr lang="en-US" sz="1050" dirty="0"/>
           </a:p>
           <a:p>
             <a:pPr indent="0" marL="0">
               <a:buNone/>
             </a:pPr>
             <a:r>
-              <a:rPr lang="en-US" sz="1000" dirty="0">
+              <a:rPr lang="en-US" sz="1050" dirty="0">
                 <a:solidFill>
                   <a:srgbClr val="E6EDF2"/>
                 </a:solidFill>
@@ -5860,14 +5877,14 @@
               </a:rPr>
               <a:t>  "authors": [{"name": "Your Name"}],</a:t>
             </a:r>
-            <a:endParaRPr lang="en-US" sz="1000" dirty="0"/>
+            <a:endParaRPr lang="en-US" sz="1050" dirty="0"/>
           </a:p>
           <a:p>
             <a:pPr indent="0" marL="0">
               <a:buNone/>
             </a:pPr>
             <a:r>
-              <a:rPr lang="en-US" sz="1000" dirty="0">
+              <a:rPr lang="en-US" sz="1050" dirty="0">
                 <a:solidFill>
                   <a:srgbClr val="E6EDF2"/>
                 </a:solidFill>
@@ -5877,14 +5894,14 @@
               </a:rPr>
               <a:t>  "license": "MIT",</a:t>
             </a:r>
-            <a:endParaRPr lang="en-US" sz="1000" dirty="0"/>
+            <a:endParaRPr lang="en-US" sz="1050" dirty="0"/>
           </a:p>
           <a:p>
             <a:pPr indent="0" marL="0">
               <a:buNone/>
             </a:pPr>
             <a:r>
-              <a:rPr lang="en-US" sz="1000" dirty="0">
+              <a:rPr lang="en-US" sz="1050" dirty="0">
                 <a:solidFill>
                   <a:srgbClr val="E6EDF2"/>
                 </a:solidFill>
@@ -5894,14 +5911,14 @@
               </a:rPr>
               <a:t>  "tags": ["arcade", "education", "textbook"],</a:t>
             </a:r>
-            <a:endParaRPr lang="en-US" sz="1000" dirty="0"/>
+            <a:endParaRPr lang="en-US" sz="1050" dirty="0"/>
           </a:p>
           <a:p>
             <a:pPr indent="0" marL="0">
               <a:buNone/>
             </a:pPr>
             <a:r>
-              <a:rPr lang="en-US" sz="1000" dirty="0">
+              <a:rPr lang="en-US" sz="1050" dirty="0">
                 <a:solidFill>
                   <a:srgbClr val="E6EDF2"/>
                 </a:solidFill>
@@ -5911,14 +5928,14 @@
               </a:rPr>
               <a:t>  "assets": {"icon": "icon.png"},</a:t>
             </a:r>
-            <a:endParaRPr lang="en-US" sz="1000" dirty="0"/>
+            <a:endParaRPr lang="en-US" sz="1050" dirty="0"/>
           </a:p>
           <a:p>
             <a:pPr indent="0" marL="0">
               <a:buNone/>
             </a:pPr>
             <a:r>
-              <a:rPr lang="en-US" sz="1000" dirty="0">
+              <a:rPr lang="en-US" sz="1050" dirty="0">
                 <a:solidFill>
                   <a:srgbClr val="E6EDF2"/>
                 </a:solidFill>
@@ -5928,14 +5945,14 @@
               </a:rPr>
               <a:t>  "architectures": [</a:t>
             </a:r>
-            <a:endParaRPr lang="en-US" sz="1000" dirty="0"/>
+            <a:endParaRPr lang="en-US" sz="1050" dirty="0"/>
           </a:p>
           <a:p>
             <a:pPr indent="0" marL="0">
               <a:buNone/>
             </a:pPr>
             <a:r>
-              <a:rPr lang="en-US" sz="1000" dirty="0">
+              <a:rPr lang="en-US" sz="1050" dirty="0">
                 <a:solidFill>
                   <a:srgbClr val="E6EDF2"/>
                 </a:solidFill>
@@ -5945,14 +5962,14 @@
               </a:rPr>
               <a:t>    {"id": "esp32c6", "file": "lemon-catcher-esp32c6.prg32"},</a:t>
             </a:r>
-            <a:endParaRPr lang="en-US" sz="1000" dirty="0"/>
+            <a:endParaRPr lang="en-US" sz="1050" dirty="0"/>
           </a:p>
           <a:p>
             <a:pPr indent="0" marL="0">
               <a:buNone/>
             </a:pPr>
             <a:r>
-              <a:rPr lang="en-US" sz="1000" dirty="0">
+              <a:rPr lang="en-US" sz="1050" dirty="0">
                 <a:solidFill>
                   <a:srgbClr val="E6EDF2"/>
                 </a:solidFill>
@@ -5962,14 +5979,14 @@
               </a:rPr>
               <a:t>    {"id": "qemu", "file": "lemon-catcher-qemu.prg32"}</a:t>
             </a:r>
-            <a:endParaRPr lang="en-US" sz="1000" dirty="0"/>
+            <a:endParaRPr lang="en-US" sz="1050" dirty="0"/>
           </a:p>
           <a:p>
             <a:pPr indent="0" marL="0">
               <a:buNone/>
             </a:pPr>
             <a:r>
-              <a:rPr lang="en-US" sz="1000" dirty="0">
+              <a:rPr lang="en-US" sz="1050" dirty="0">
                 <a:solidFill>
                   <a:srgbClr val="E6EDF2"/>
                 </a:solidFill>
@@ -5979,14 +5996,14 @@
               </a:rPr>
               <a:t>  ]</a:t>
             </a:r>
-            <a:endParaRPr lang="en-US" sz="1000" dirty="0"/>
+            <a:endParaRPr lang="en-US" sz="1050" dirty="0"/>
           </a:p>
           <a:p>
             <a:pPr indent="0" marL="0">
               <a:buNone/>
             </a:pPr>
             <a:r>
-              <a:rPr lang="en-US" sz="1000" dirty="0">
+              <a:rPr lang="en-US" sz="1050" dirty="0">
                 <a:solidFill>
                   <a:srgbClr val="E6EDF2"/>
                 </a:solidFill>
@@ -5996,7 +6013,7 @@
               </a:rPr>
               <a:t>}</a:t>
             </a:r>
-            <a:endParaRPr lang="en-US" sz="1000" dirty="0"/>
+            <a:endParaRPr lang="en-US" sz="1050" dirty="0"/>
           </a:p>
         </p:txBody>
       </p:sp>
@@ -13176,7 +13193,7 @@
               <a:buNone/>
             </a:pPr>
             <a:r>
-              <a:rPr lang="en-US" sz="1050" dirty="0">
+              <a:rPr lang="en-US" sz="1250" dirty="0">
                 <a:solidFill>
                   <a:srgbClr val="E6EDF2"/>
                 </a:solidFill>
@@ -13184,16 +13201,16 @@
                 <a:ea typeface="Courier New" pitchFamily="34" charset="-122"/>
                 <a:cs typeface="Courier New" pitchFamily="34" charset="-120"/>
               </a:rPr>
-              <a:t>ID                               Title                    Version  Architectures</a:t>
-            </a:r>
-            <a:endParaRPr lang="en-US" sz="1050" dirty="0"/>
+              <a:t>ID                               Title                    Version </a:t>
+            </a:r>
+            <a:endParaRPr lang="en-US" sz="1250" dirty="0"/>
           </a:p>
           <a:p>
             <a:pPr indent="0" marL="0">
               <a:buNone/>
             </a:pPr>
             <a:r>
-              <a:rPr lang="en-US" sz="1050" dirty="0">
+              <a:rPr lang="en-US" sz="1250" dirty="0">
                 <a:solidFill>
                   <a:srgbClr val="E6EDF2"/>
                 </a:solidFill>
@@ -13201,9 +13218,43 @@
                 <a:ea typeface="Courier New" pitchFamily="34" charset="-122"/>
                 <a:cs typeface="Courier New" pitchFamily="34" charset="-120"/>
               </a:rPr>
-              <a:t>org.example.lemon-catcher        Lemon Catcher                     esp32c6, qemu</a:t>
-            </a:r>
-            <a:endParaRPr lang="en-US" sz="1050" dirty="0"/>
+              <a:t>    Architectures</a:t>
+            </a:r>
+            <a:endParaRPr lang="en-US" sz="1250" dirty="0"/>
+          </a:p>
+          <a:p>
+            <a:pPr indent="0" marL="0">
+              <a:buNone/>
+            </a:pPr>
+            <a:r>
+              <a:rPr lang="en-US" sz="1250" dirty="0">
+                <a:solidFill>
+                  <a:srgbClr val="E6EDF2"/>
+                </a:solidFill>
+                <a:latin typeface="Courier New" pitchFamily="34" charset="0"/>
+                <a:ea typeface="Courier New" pitchFamily="34" charset="-122"/>
+                <a:cs typeface="Courier New" pitchFamily="34" charset="-120"/>
+              </a:rPr>
+              <a:t>org.example.lemon-catcher        Lemon Catcher                    </a:t>
+            </a:r>
+            <a:endParaRPr lang="en-US" sz="1250" dirty="0"/>
+          </a:p>
+          <a:p>
+            <a:pPr indent="0" marL="0">
+              <a:buNone/>
+            </a:pPr>
+            <a:r>
+              <a:rPr lang="en-US" sz="1250" dirty="0">
+                <a:solidFill>
+                  <a:srgbClr val="E6EDF2"/>
+                </a:solidFill>
+                <a:latin typeface="Courier New" pitchFamily="34" charset="0"/>
+                <a:ea typeface="Courier New" pitchFamily="34" charset="-122"/>
+                <a:cs typeface="Courier New" pitchFamily="34" charset="-120"/>
+              </a:rPr>
+              <a:t>    esp32c6, qemu</a:t>
+            </a:r>
+            <a:endParaRPr lang="en-US" sz="1250" dirty="0"/>
           </a:p>
         </p:txBody>
       </p:sp>
@@ -14339,7 +14390,7 @@
               <a:buNone/>
             </a:pPr>
             <a:r>
-              <a:rPr lang="en-US" sz="1000" dirty="0">
+              <a:rPr lang="en-US" sz="1250" dirty="0">
                 <a:solidFill>
                   <a:srgbClr val="8FB3A0"/>
                 </a:solidFill>
@@ -14349,14 +14400,14 @@
               </a:rPr>
               <a:t>#!/usr/bin/env bash</a:t>
             </a:r>
-            <a:endParaRPr lang="en-US" sz="1000" dirty="0"/>
+            <a:endParaRPr lang="en-US" sz="1250" dirty="0"/>
           </a:p>
           <a:p>
             <a:pPr indent="0" marL="0">
               <a:buNone/>
             </a:pPr>
             <a:r>
-              <a:rPr lang="en-US" sz="1000" dirty="0">
+              <a:rPr lang="en-US" sz="1250" dirty="0">
                 <a:solidFill>
                   <a:srgbClr val="8FB3A0"/>
                 </a:solidFill>
@@ -14366,14 +14417,14 @@
               </a:rPr>
               <a:t># Administrators: first deployment of a classroom Store.</a:t>
             </a:r>
-            <a:endParaRPr lang="en-US" sz="1000" dirty="0"/>
+            <a:endParaRPr lang="en-US" sz="1250" dirty="0"/>
           </a:p>
           <a:p>
             <a:pPr indent="0" marL="0">
               <a:buNone/>
             </a:pPr>
             <a:r>
-              <a:rPr lang="en-US" sz="1000" dirty="0">
+              <a:rPr lang="en-US" sz="1250" dirty="0">
                 <a:solidFill>
                   <a:srgbClr val="E6EDF2"/>
                 </a:solidFill>
@@ -14383,14 +14434,14 @@
               </a:rPr>
               <a:t>git clone https://github.com/riscv-prg32/CartridgeStore.git</a:t>
             </a:r>
-            <a:endParaRPr lang="en-US" sz="1000" dirty="0"/>
+            <a:endParaRPr lang="en-US" sz="1250" dirty="0"/>
           </a:p>
           <a:p>
             <a:pPr indent="0" marL="0">
               <a:buNone/>
             </a:pPr>
             <a:r>
-              <a:rPr lang="en-US" sz="1000" dirty="0">
+              <a:rPr lang="en-US" sz="1250" dirty="0">
                 <a:solidFill>
                   <a:srgbClr val="E6EDF2"/>
                 </a:solidFill>
@@ -14400,14 +14451,14 @@
               </a:rPr>
               <a:t>cd CartridgeStore</a:t>
             </a:r>
-            <a:endParaRPr lang="en-US" sz="1000" dirty="0"/>
+            <a:endParaRPr lang="en-US" sz="1250" dirty="0"/>
           </a:p>
           <a:p>
             <a:pPr indent="0" marL="0">
               <a:buNone/>
             </a:pPr>
             <a:r>
-              <a:rPr lang="en-US" sz="1000" dirty="0">
+              <a:rPr lang="en-US" sz="1250" dirty="0">
                 <a:solidFill>
                   <a:srgbClr val="E6EDF2"/>
                 </a:solidFill>
@@ -14415,16 +14466,16 @@
                 <a:ea typeface="Courier New" pitchFamily="34" charset="-122"/>
                 <a:cs typeface="Courier New" pitchFamily="34" charset="-120"/>
               </a:rPr>
-              <a:t>export SECRET_KEY="$(python3 -c 'import secrets; print(secrets.token_urlsafe(32))')"</a:t>
-            </a:r>
-            <a:endParaRPr lang="en-US" sz="1000" dirty="0"/>
+              <a:t>export SECRET_KEY="$(python3 -c 'import secrets;</a:t>
+            </a:r>
+            <a:endParaRPr lang="en-US" sz="1250" dirty="0"/>
           </a:p>
           <a:p>
             <a:pPr indent="0" marL="0">
               <a:buNone/>
             </a:pPr>
             <a:r>
-              <a:rPr lang="en-US" sz="1000" dirty="0">
+              <a:rPr lang="en-US" sz="1250" dirty="0">
                 <a:solidFill>
                   <a:srgbClr val="E6EDF2"/>
                 </a:solidFill>
@@ -14432,16 +14483,16 @@
                 <a:ea typeface="Courier New" pitchFamily="34" charset="-122"/>
                 <a:cs typeface="Courier New" pitchFamily="34" charset="-120"/>
               </a:rPr>
-              <a:t>docker compose up --build -d</a:t>
-            </a:r>
-            <a:endParaRPr lang="en-US" sz="1000" dirty="0"/>
+              <a:t>    print(secrets.token_urlsafe(32))')"</a:t>
+            </a:r>
+            <a:endParaRPr lang="en-US" sz="1250" dirty="0"/>
           </a:p>
           <a:p>
             <a:pPr indent="0" marL="0">
               <a:buNone/>
             </a:pPr>
             <a:r>
-              <a:rPr lang="en-US" sz="1000" dirty="0">
+              <a:rPr lang="en-US" sz="1250" dirty="0">
                 <a:solidFill>
                   <a:srgbClr val="E6EDF2"/>
                 </a:solidFill>
@@ -14449,30 +14500,30 @@
                 <a:ea typeface="Courier New" pitchFamily="34" charset="-122"/>
                 <a:cs typeface="Courier New" pitchFamily="34" charset="-120"/>
               </a:rPr>
-              <a:t>curl http://127.0.0.1:5080/.well-known/prg32-store.json  </a:t>
-            </a:r>
+              <a:t>docker compose up --build -d</a:t>
+            </a:r>
+            <a:endParaRPr lang="en-US" sz="1250" dirty="0"/>
+          </a:p>
+          <a:p>
             <a:pPr indent="0" marL="0">
               <a:buNone/>
             </a:pPr>
             <a:r>
-              <a:rPr lang="en-US" sz="1000" dirty="0">
-                <a:solidFill>
-                  <a:srgbClr val="8FB3A0"/>
+              <a:rPr lang="en-US" sz="1250" dirty="0">
+                <a:solidFill>
+                  <a:srgbClr val="E6EDF2"/>
                 </a:solidFill>
                 <a:latin typeface="Courier New" pitchFamily="34" charset="0"/>
                 <a:ea typeface="Courier New" pitchFamily="34" charset="-122"/>
                 <a:cs typeface="Courier New" pitchFamily="34" charset="-120"/>
               </a:rPr>
-              <a:t> # health check</a:t>
-            </a:r>
-            <a:endParaRPr lang="en-US" sz="1000" dirty="0"/>
-          </a:p>
-          <a:p>
+              <a:t>curl http://127.0.0.1:5080/.well-known/prg32-store.json  </a:t>
+            </a:r>
             <a:pPr indent="0" marL="0">
               <a:buNone/>
             </a:pPr>
             <a:r>
-              <a:rPr lang="en-US" sz="1000" dirty="0">
+              <a:rPr lang="en-US" sz="1250" dirty="0">
                 <a:solidFill>
                   <a:srgbClr val="8FB3A0"/>
                 </a:solidFill>
@@ -14480,9 +14531,60 @@
                 <a:ea typeface="Courier New" pitchFamily="34" charset="-122"/>
                 <a:cs typeface="Courier New" pitchFamily="34" charset="-120"/>
               </a:rPr>
-              <a:t># Then log in as admin at /auth/login and change the default password.</a:t>
-            </a:r>
-            <a:endParaRPr lang="en-US" sz="1000" dirty="0"/>
+              <a:t> # health</a:t>
+            </a:r>
+            <a:endParaRPr lang="en-US" sz="1250" dirty="0"/>
+          </a:p>
+          <a:p>
+            <a:pPr indent="0" marL="0">
+              <a:buNone/>
+            </a:pPr>
+            <a:r>
+              <a:rPr lang="en-US" sz="1250" dirty="0">
+                <a:solidFill>
+                  <a:srgbClr val="E6EDF2"/>
+                </a:solidFill>
+                <a:latin typeface="Courier New" pitchFamily="34" charset="0"/>
+                <a:ea typeface="Courier New" pitchFamily="34" charset="-122"/>
+                <a:cs typeface="Courier New" pitchFamily="34" charset="-120"/>
+              </a:rPr>
+              <a:t>    check</a:t>
+            </a:r>
+            <a:endParaRPr lang="en-US" sz="1250" dirty="0"/>
+          </a:p>
+          <a:p>
+            <a:pPr indent="0" marL="0">
+              <a:buNone/>
+            </a:pPr>
+            <a:r>
+              <a:rPr lang="en-US" sz="1250" dirty="0">
+                <a:solidFill>
+                  <a:srgbClr val="8FB3A0"/>
+                </a:solidFill>
+                <a:latin typeface="Courier New" pitchFamily="34" charset="0"/>
+                <a:ea typeface="Courier New" pitchFamily="34" charset="-122"/>
+                <a:cs typeface="Courier New" pitchFamily="34" charset="-120"/>
+              </a:rPr>
+              <a:t># Then log in as admin at /auth/login and change the default</a:t>
+            </a:r>
+            <a:endParaRPr lang="en-US" sz="1250" dirty="0"/>
+          </a:p>
+          <a:p>
+            <a:pPr indent="0" marL="0">
+              <a:buNone/>
+            </a:pPr>
+            <a:r>
+              <a:rPr lang="en-US" sz="1250" dirty="0">
+                <a:solidFill>
+                  <a:srgbClr val="E6EDF2"/>
+                </a:solidFill>
+                <a:latin typeface="Courier New" pitchFamily="34" charset="0"/>
+                <a:ea typeface="Courier New" pitchFamily="34" charset="-122"/>
+                <a:cs typeface="Courier New" pitchFamily="34" charset="-120"/>
+              </a:rPr>
+              <a:t>    password.</a:t>
+            </a:r>
+            <a:endParaRPr lang="en-US" sz="1250" dirty="0"/>
           </a:p>
         </p:txBody>
       </p:sp>
